--- a/transformer/transformer.pptx
+++ b/transformer/transformer.pptx
@@ -469,7 +469,7 @@
                   <a:schemeClr val="bg1"/>
                 </a:solidFill>
               </a:rPr>
-              <a:t>September 27, 2026</a:t>
+              <a:t>October 22, 2026</a:t>
             </a:r>
             <a:endParaRPr lang="en-US" sz="1100"/>
           </a:p>
@@ -831,7 +831,7 @@
                   <a:schemeClr val="bg1"/>
                 </a:solidFill>
               </a:rPr>
-              <a:t>September 27, 2026</a:t>
+              <a:t>October 22, 2026</a:t>
             </a:r>
             <a:endParaRPr lang="en-US" sz="1100"/>
           </a:p>
@@ -1257,7 +1257,7 @@
                   <a:schemeClr val="bg1"/>
                 </a:solidFill>
               </a:rPr>
-              <a:t>September 27, 2026</a:t>
+              <a:t>October 22, 2026</a:t>
             </a:r>
             <a:endParaRPr lang="en-US" sz="1100"/>
           </a:p>
@@ -1845,7 +1845,7 @@
             </a:pPr>
             <a:r>
               <a:rPr/>
-              <a:t>September 27, 2026</a:t>
+              <a:t>October 22, 2026</a:t>
             </a:r>
           </a:p>
         </p:txBody>
@@ -8974,8 +8974,8 @@
             </p:nvSpPr>
             <p:spPr>
               <a:xfrm>
-                <a:off x="6278727" y="2378456"/>
-                <a:ext cx="5364327" cy="2741168"/>
+                <a:off x="6278727" y="2546096"/>
+                <a:ext cx="5364327" cy="2405888"/>
               </a:xfrm>
               <a:prstGeom prst="rect">
                 <a:avLst/>
@@ -9291,8 +9291,8 @@
             </p:nvSpPr>
             <p:spPr>
               <a:xfrm>
-                <a:off x="6278727" y="2378456"/>
-                <a:ext cx="5364327" cy="2741168"/>
+                <a:off x="6278727" y="2546096"/>
+                <a:ext cx="5364327" cy="2405888"/>
               </a:xfrm>
               <a:prstGeom prst="rect">
                 <a:avLst/>
@@ -11415,8 +11415,8 @@
           <p:nvPr/>
         </p:nvGraphicFramePr>
         <p:xfrm>
-          <a:off x="548640" y="2421179"/>
-          <a:ext cx="11094414" cy="1787044"/>
+          <a:off x="548640" y="2419096"/>
+          <a:ext cx="11094414" cy="1791208"/>
         </p:xfrm>
         <a:graphic>
           <a:graphicData uri="http://schemas.openxmlformats.org/drawingml/2006/table">
@@ -11430,7 +11430,7 @@
                 <a:gridCol w="3070820"/>
                 <a:gridCol w="2179170"/>
               </a:tblGrid>
-              <a:tr h="446761">
+              <a:tr h="447802">
                 <a:tc>
                   <a:txBody>
                     <a:bodyPr/>
@@ -11584,7 +11584,7 @@
                   </a:tcPr>
                 </a:tc>
               </a:tr>
-              <a:tr h="446761">
+              <a:tr h="447802">
                 <a:tc>
                   <a:txBody>
                     <a:bodyPr/>
@@ -11714,7 +11714,7 @@
                   </a:tcPr>
                 </a:tc>
               </a:tr>
-              <a:tr h="446761">
+              <a:tr h="447802">
                 <a:tc>
                   <a:txBody>
                     <a:bodyPr/>
@@ -11844,7 +11844,7 @@
                   </a:tcPr>
                 </a:tc>
               </a:tr>
-              <a:tr h="446761">
+              <a:tr h="447802">
                 <a:tc>
                   <a:txBody>
                     <a:bodyPr/>
@@ -12000,7 +12000,7 @@
             </p:nvSpPr>
             <p:spPr>
               <a:xfrm>
-                <a:off x="548640" y="4436821"/>
+                <a:off x="548640" y="4438904"/>
                 <a:ext cx="11094415" cy="640080"/>
               </a:xfrm>
               <a:prstGeom prst="rect">
@@ -12230,7 +12230,7 @@
             </p:nvSpPr>
             <p:spPr>
               <a:xfrm>
-                <a:off x="548640" y="4436821"/>
+                <a:off x="548640" y="4438904"/>
                 <a:ext cx="11094415" cy="640080"/>
               </a:xfrm>
               <a:prstGeom prst="rect">
@@ -21812,8 +21812,8 @@
         </p:nvSpPr>
         <p:spPr>
           <a:xfrm>
-            <a:off x="548640" y="1259950"/>
-            <a:ext cx="11094415" cy="513080"/>
+            <a:off x="548640" y="1313860"/>
+            <a:ext cx="11094415" cy="529844"/>
           </a:xfrm>
           <a:prstGeom prst="rect">
             <a:avLst/>
@@ -22029,7 +22029,7 @@
               <a:buNone/>
             </a:pPr>
             <a:r>
-              <a:rPr sz="1980"/>
+              <a:rPr sz="2090"/>
               <a:t>Autoregressive factorisation of the target sequence:</a:t>
             </a:r>
           </a:p>
@@ -22045,8 +22045,8 @@
             </p:nvSpPr>
             <p:spPr>
               <a:xfrm>
-                <a:off x="548640" y="2001630"/>
-                <a:ext cx="11094415" cy="864108"/>
+                <a:off x="548640" y="2072304"/>
+                <a:ext cx="11094415" cy="912114"/>
               </a:xfrm>
               <a:prstGeom prst="rect">
                 <a:avLst/>
@@ -22069,7 +22069,7 @@
                       <m:sSub>
                         <m:e>
                           <m:r>
-                            <a:rPr lang="en-US" sz="2079" i="1">
+                            <a:rPr lang="en-US" sz="2194" i="1">
                               <a:latin typeface="Cambria Math"/>
                             </a:rPr>
                             <m:t>p</m:t>
@@ -22077,7 +22077,7 @@
                         </m:e>
                         <m:sub>
                           <m:r>
-                            <a:rPr lang="en-US" sz="2079" i="1">
+                            <a:rPr lang="en-US" sz="2194" i="1">
                               <a:latin typeface="Cambria Math"/>
                             </a:rPr>
                             <m:t>θ</m:t>
@@ -22088,13 +22088,13 @@
                         <m:rPr>
                           <m:sty m:val="p"/>
                         </m:rPr>
-                        <a:rPr lang="en-US" sz="2079" i="0">
+                        <a:rPr lang="en-US" sz="2194" i="0">
                           <a:latin typeface="Cambria Math"/>
                         </a:rPr>
                         <m:t>(</m:t>
                       </m:r>
                       <m:r>
-                        <a:rPr lang="en-US" sz="2079" i="1">
+                        <a:rPr lang="en-US" sz="2194" i="1">
                           <a:latin typeface="Cambria Math"/>
                         </a:rPr>
                         <m:t>y</m:t>
@@ -22103,13 +22103,13 @@
                         <m:rPr>
                           <m:sty m:val="p"/>
                         </m:rPr>
-                        <a:rPr lang="en-US" sz="2079" i="0">
+                        <a:rPr lang="en-US" sz="2194" i="0">
                           <a:latin typeface="Cambria Math"/>
                         </a:rPr>
                         <m:t>∣</m:t>
                       </m:r>
                       <m:r>
-                        <a:rPr lang="en-US" sz="2079" i="1">
+                        <a:rPr lang="en-US" sz="2194" i="1">
                           <a:latin typeface="Cambria Math"/>
                         </a:rPr>
                         <m:t>x</m:t>
@@ -22118,7 +22118,7 @@
                         <m:rPr>
                           <m:sty m:val="p"/>
                         </m:rPr>
-                        <a:rPr lang="en-US" sz="2079" i="0">
+                        <a:rPr lang="en-US" sz="2194" i="0">
                           <a:latin typeface="Cambria Math"/>
                         </a:rPr>
                         <m:t>)</m:t>
@@ -22127,7 +22127,7 @@
                         <m:rPr>
                           <m:sty m:val="p"/>
                         </m:rPr>
-                        <a:rPr lang="en-US" sz="2079" i="0">
+                        <a:rPr lang="en-US" sz="2194" i="0">
                           <a:latin typeface="Cambria Math"/>
                         </a:rPr>
                         <m:t>=</m:t>
@@ -22141,7 +22141,7 @@
                         </m:naryPr>
                         <m:sub>
                           <m:r>
-                            <a:rPr lang="en-US" sz="2079" i="1">
+                            <a:rPr lang="en-US" sz="2194" i="1">
                               <a:latin typeface="Cambria Math"/>
                             </a:rPr>
                             <m:t>t</m:t>
@@ -22150,13 +22150,13 @@
                             <m:rPr>
                               <m:sty m:val="p"/>
                             </m:rPr>
-                            <a:rPr lang="en-US" sz="2079" i="0">
+                            <a:rPr lang="en-US" sz="2194" i="0">
                               <a:latin typeface="Cambria Math"/>
                             </a:rPr>
                             <m:t>=</m:t>
                           </m:r>
                           <m:r>
-                            <a:rPr lang="en-US" sz="2079" i="0">
+                            <a:rPr lang="en-US" sz="2194" i="0">
                               <a:latin typeface="Cambria Math"/>
                             </a:rPr>
                             <m:t>1</m:t>
@@ -22164,7 +22164,7 @@
                         </m:sub>
                         <m:sup>
                           <m:r>
-                            <a:rPr lang="en-US" sz="2079" i="1">
+                            <a:rPr lang="en-US" sz="2194" i="1">
                               <a:latin typeface="Cambria Math"/>
                             </a:rPr>
                             <m:t>T</m:t>
@@ -22174,7 +22174,7 @@
                           <m:sSub>
                             <m:e>
                               <m:r>
-                                <a:rPr lang="en-US" sz="2079" i="1">
+                                <a:rPr lang="en-US" sz="2194" i="1">
                                   <a:latin typeface="Cambria Math"/>
                                 </a:rPr>
                                 <m:t>p</m:t>
@@ -22182,7 +22182,7 @@
                             </m:e>
                             <m:sub>
                               <m:r>
-                                <a:rPr lang="en-US" sz="2079" i="1">
+                                <a:rPr lang="en-US" sz="2194" i="1">
                                   <a:latin typeface="Cambria Math"/>
                                 </a:rPr>
                                 <m:t>θ</m:t>
@@ -22195,7 +22195,7 @@
                         <m:rPr>
                           <m:sty m:val="p"/>
                         </m:rPr>
-                        <a:rPr lang="en-US" sz="2079" i="0">
+                        <a:rPr lang="en-US" sz="2194" i="0">
                           <a:latin typeface="Cambria Math"/>
                         </a:rPr>
                         <m:t>(</m:t>
@@ -22203,7 +22203,7 @@
                       <m:sSub>
                         <m:e>
                           <m:r>
-                            <a:rPr lang="en-US" sz="2079" i="1">
+                            <a:rPr lang="en-US" sz="2194" i="1">
                               <a:latin typeface="Cambria Math"/>
                             </a:rPr>
                             <m:t>y</m:t>
@@ -22211,7 +22211,7 @@
                         </m:e>
                         <m:sub>
                           <m:r>
-                            <a:rPr lang="en-US" sz="2079" i="1">
+                            <a:rPr lang="en-US" sz="2194" i="1">
                               <a:latin typeface="Cambria Math"/>
                             </a:rPr>
                             <m:t>t</m:t>
@@ -22222,7 +22222,7 @@
                         <m:rPr>
                           <m:sty m:val="p"/>
                         </m:rPr>
-                        <a:rPr lang="en-US" sz="2079" i="0">
+                        <a:rPr lang="en-US" sz="2194" i="0">
                           <a:latin typeface="Cambria Math"/>
                         </a:rPr>
                         <m:t>∣</m:t>
@@ -22230,7 +22230,7 @@
                       <m:sSub>
                         <m:e>
                           <m:r>
-                            <a:rPr lang="en-US" sz="2079" i="1">
+                            <a:rPr lang="en-US" sz="2194" i="1">
                               <a:latin typeface="Cambria Math"/>
                             </a:rPr>
                             <m:t>y</m:t>
@@ -22241,13 +22241,13 @@
                             <m:rPr>
                               <m:sty m:val="p"/>
                             </m:rPr>
-                            <a:rPr lang="en-US" sz="2079" i="0">
+                            <a:rPr lang="en-US" sz="2194" i="0">
                               <a:latin typeface="Cambria Math"/>
                             </a:rPr>
                             <m:t>&lt;</m:t>
                           </m:r>
                           <m:r>
-                            <a:rPr lang="en-US" sz="2079" i="1">
+                            <a:rPr lang="en-US" sz="2194" i="1">
                               <a:latin typeface="Cambria Math"/>
                             </a:rPr>
                             <m:t>t</m:t>
@@ -22258,13 +22258,13 @@
                         <m:rPr>
                           <m:sty m:val="p"/>
                         </m:rPr>
-                        <a:rPr lang="en-US" sz="2079" i="0">
+                        <a:rPr lang="en-US" sz="2194" i="0">
                           <a:latin typeface="Cambria Math"/>
                         </a:rPr>
                         <m:t>,</m:t>
                       </m:r>
                       <m:r>
-                        <a:rPr lang="en-US" sz="2079" i="1">
+                        <a:rPr lang="en-US" sz="2194" i="1">
                           <a:latin typeface="Cambria Math"/>
                         </a:rPr>
                         <m:t>x</m:t>
@@ -22273,7 +22273,7 @@
                         <m:rPr>
                           <m:sty m:val="p"/>
                         </m:rPr>
-                        <a:rPr lang="en-US" sz="2079" i="0">
+                        <a:rPr lang="en-US" sz="2194" i="0">
                           <a:latin typeface="Cambria Math"/>
                         </a:rPr>
                         <m:t>)</m:t>
@@ -22294,8 +22294,8 @@
             </p:nvSpPr>
             <p:spPr>
               <a:xfrm>
-                <a:off x="548640" y="2001630"/>
-                <a:ext cx="11094415" cy="864108"/>
+                <a:off x="548640" y="2072304"/>
+                <a:ext cx="11094415" cy="912114"/>
               </a:xfrm>
               <a:prstGeom prst="rect">
                 <a:avLst/>
@@ -22310,7 +22310,7 @@
               <a:p>
                 <a:pPr algn="ctr"/>
                 <a:r>
-                  <a:rPr sz="2079" i="1"/>
+                  <a:rPr sz="2194" i="1"/>
                   <a:t>p_θ(y | x) = ∏_(t=1)ᵀ p_θ(y_t | y_(&lt;t), x)</a:t>
                 </a:r>
               </a:p>
@@ -22326,8 +22326,8 @@
         </p:nvSpPr>
         <p:spPr>
           <a:xfrm>
-            <a:off x="548640" y="3094338"/>
-            <a:ext cx="11094415" cy="513080"/>
+            <a:off x="548640" y="3213018"/>
+            <a:ext cx="11094415" cy="529844"/>
           </a:xfrm>
           <a:prstGeom prst="rect">
             <a:avLst/>
@@ -22543,7 +22543,7 @@
               <a:buNone/>
             </a:pPr>
             <a:r>
-              <a:rPr sz="1980"/>
+              <a:rPr sz="2090"/>
               <a:t>Teacher forcing with cross-entropy (all positions in parallel):</a:t>
             </a:r>
           </a:p>
@@ -22559,8 +22559,8 @@
             </p:nvSpPr>
             <p:spPr>
               <a:xfrm>
-                <a:off x="548640" y="3836018"/>
-                <a:ext cx="11094415" cy="864108"/>
+                <a:off x="548640" y="3971462"/>
+                <a:ext cx="11094415" cy="912114"/>
               </a:xfrm>
               <a:prstGeom prst="rect">
                 <a:avLst/>
@@ -22585,7 +22585,7 @@
                           <m:scr m:val="script"/>
                           <m:sty m:val="p"/>
                         </m:rPr>
-                        <a:rPr lang="en-US" sz="2079" i="0">
+                        <a:rPr lang="en-US" sz="2194" i="0">
                           <a:latin typeface="Cambria Math"/>
                         </a:rPr>
                         <m:t>L</m:t>
@@ -22594,13 +22594,13 @@
                         <m:rPr>
                           <m:sty m:val="p"/>
                         </m:rPr>
-                        <a:rPr lang="en-US" sz="2079" i="0">
+                        <a:rPr lang="en-US" sz="2194" i="0">
                           <a:latin typeface="Cambria Math"/>
                         </a:rPr>
                         <m:t>(</m:t>
                       </m:r>
                       <m:r>
-                        <a:rPr lang="en-US" sz="2079" i="1">
+                        <a:rPr lang="en-US" sz="2194" i="1">
                           <a:latin typeface="Cambria Math"/>
                         </a:rPr>
                         <m:t>θ</m:t>
@@ -22609,7 +22609,7 @@
                         <m:rPr>
                           <m:sty m:val="p"/>
                         </m:rPr>
-                        <a:rPr lang="en-US" sz="2079" i="0">
+                        <a:rPr lang="en-US" sz="2194" i="0">
                           <a:latin typeface="Cambria Math"/>
                         </a:rPr>
                         <m:t>)</m:t>
@@ -22618,7 +22618,7 @@
                         <m:rPr>
                           <m:sty m:val="p"/>
                         </m:rPr>
-                        <a:rPr lang="en-US" sz="2079" i="0">
+                        <a:rPr lang="en-US" sz="2194" i="0">
                           <a:latin typeface="Cambria Math"/>
                         </a:rPr>
                         <m:t>=</m:t>
@@ -22627,7 +22627,7 @@
                         <m:rPr>
                           <m:sty m:val="p"/>
                         </m:rPr>
-                        <a:rPr lang="en-US" sz="2079" i="0">
+                        <a:rPr lang="en-US" sz="2194" i="0">
                           <a:latin typeface="Cambria Math"/>
                         </a:rPr>
                         <m:t>−</m:t>
@@ -22641,7 +22641,7 @@
                         </m:naryPr>
                         <m:sub>
                           <m:r>
-                            <a:rPr lang="en-US" sz="2079" i="1">
+                            <a:rPr lang="en-US" sz="2194" i="1">
                               <a:latin typeface="Cambria Math"/>
                             </a:rPr>
                             <m:t>t</m:t>
@@ -22650,13 +22650,13 @@
                             <m:rPr>
                               <m:sty m:val="p"/>
                             </m:rPr>
-                            <a:rPr lang="en-US" sz="2079" i="0">
+                            <a:rPr lang="en-US" sz="2194" i="0">
                               <a:latin typeface="Cambria Math"/>
                             </a:rPr>
                             <m:t>=</m:t>
                           </m:r>
                           <m:r>
-                            <a:rPr lang="en-US" sz="2079" i="0">
+                            <a:rPr lang="en-US" sz="2194" i="0">
                               <a:latin typeface="Cambria Math"/>
                             </a:rPr>
                             <m:t>1</m:t>
@@ -22664,7 +22664,7 @@
                         </m:sub>
                         <m:sup>
                           <m:r>
-                            <a:rPr lang="en-US" sz="2079" i="1">
+                            <a:rPr lang="en-US" sz="2194" i="1">
                               <a:latin typeface="Cambria Math"/>
                             </a:rPr>
                             <m:t>T</m:t>
@@ -22675,7 +22675,7 @@
                             <m:rPr>
                               <m:sty m:val="p"/>
                             </m:rPr>
-                            <a:rPr lang="en-US" sz="2079" i="0">
+                            <a:rPr lang="en-US" sz="2194" i="0">
                               <a:latin typeface="Cambria Math"/>
                             </a:rPr>
                             <m:t>log</m:t>
@@ -22685,7 +22685,7 @@
                       <m:sSub>
                         <m:e>
                           <m:r>
-                            <a:rPr lang="en-US" sz="2079" i="1">
+                            <a:rPr lang="en-US" sz="2194" i="1">
                               <a:latin typeface="Cambria Math"/>
                             </a:rPr>
                             <m:t>p</m:t>
@@ -22693,7 +22693,7 @@
                         </m:e>
                         <m:sub>
                           <m:r>
-                            <a:rPr lang="en-US" sz="2079" i="1">
+                            <a:rPr lang="en-US" sz="2194" i="1">
                               <a:latin typeface="Cambria Math"/>
                             </a:rPr>
                             <m:t>θ</m:t>
@@ -22704,7 +22704,7 @@
                         <m:rPr>
                           <m:sty m:val="p"/>
                         </m:rPr>
-                        <a:rPr lang="en-US" sz="2079" i="0">
+                        <a:rPr lang="en-US" sz="2194" i="0">
                           <a:latin typeface="Cambria Math"/>
                         </a:rPr>
                         <m:t>(</m:t>
@@ -22712,7 +22712,7 @@
                       <m:sSub>
                         <m:e>
                           <m:r>
-                            <a:rPr lang="en-US" sz="2079" i="1">
+                            <a:rPr lang="en-US" sz="2194" i="1">
                               <a:latin typeface="Cambria Math"/>
                             </a:rPr>
                             <m:t>y</m:t>
@@ -22720,7 +22720,7 @@
                         </m:e>
                         <m:sub>
                           <m:r>
-                            <a:rPr lang="en-US" sz="2079" i="1">
+                            <a:rPr lang="en-US" sz="2194" i="1">
                               <a:latin typeface="Cambria Math"/>
                             </a:rPr>
                             <m:t>t</m:t>
@@ -22731,7 +22731,7 @@
                         <m:rPr>
                           <m:sty m:val="p"/>
                         </m:rPr>
-                        <a:rPr lang="en-US" sz="2079" i="0">
+                        <a:rPr lang="en-US" sz="2194" i="0">
                           <a:latin typeface="Cambria Math"/>
                         </a:rPr>
                         <m:t>∣</m:t>
@@ -22739,7 +22739,7 @@
                       <m:sSub>
                         <m:e>
                           <m:r>
-                            <a:rPr lang="en-US" sz="2079" i="1">
+                            <a:rPr lang="en-US" sz="2194" i="1">
                               <a:latin typeface="Cambria Math"/>
                             </a:rPr>
                             <m:t>y</m:t>
@@ -22750,13 +22750,13 @@
                             <m:rPr>
                               <m:sty m:val="p"/>
                             </m:rPr>
-                            <a:rPr lang="en-US" sz="2079" i="0">
+                            <a:rPr lang="en-US" sz="2194" i="0">
                               <a:latin typeface="Cambria Math"/>
                             </a:rPr>
                             <m:t>&lt;</m:t>
                           </m:r>
                           <m:r>
-                            <a:rPr lang="en-US" sz="2079" i="1">
+                            <a:rPr lang="en-US" sz="2194" i="1">
                               <a:latin typeface="Cambria Math"/>
                             </a:rPr>
                             <m:t>t</m:t>
@@ -22767,13 +22767,13 @@
                         <m:rPr>
                           <m:sty m:val="p"/>
                         </m:rPr>
-                        <a:rPr lang="en-US" sz="2079" i="0">
+                        <a:rPr lang="en-US" sz="2194" i="0">
                           <a:latin typeface="Cambria Math"/>
                         </a:rPr>
                         <m:t>,</m:t>
                       </m:r>
                       <m:r>
-                        <a:rPr lang="en-US" sz="2079" i="1">
+                        <a:rPr lang="en-US" sz="2194" i="1">
                           <a:latin typeface="Cambria Math"/>
                         </a:rPr>
                         <m:t>x</m:t>
@@ -22782,7 +22782,7 @@
                         <m:rPr>
                           <m:sty m:val="p"/>
                         </m:rPr>
-                        <a:rPr lang="en-US" sz="2079" i="0">
+                        <a:rPr lang="en-US" sz="2194" i="0">
                           <a:latin typeface="Cambria Math"/>
                         </a:rPr>
                         <m:t>)</m:t>
@@ -22803,8 +22803,8 @@
             </p:nvSpPr>
             <p:spPr>
               <a:xfrm>
-                <a:off x="548640" y="3836018"/>
-                <a:ext cx="11094415" cy="864108"/>
+                <a:off x="548640" y="3971462"/>
+                <a:ext cx="11094415" cy="912114"/>
               </a:xfrm>
               <a:prstGeom prst="rect">
                 <a:avLst/>
@@ -22819,7 +22819,7 @@
               <a:p>
                 <a:pPr algn="ctr"/>
                 <a:r>
-                  <a:rPr sz="2079" i="1"/>
+                  <a:rPr sz="2194" i="1"/>
                   <a:t>L(θ) = −∑_(t=1)ᵀ log p_θ(y_t | y_(&lt;t), x)</a:t>
                 </a:r>
               </a:p>
@@ -22835,10 +22835,10 @@
         </p:nvGrpSpPr>
         <p:grpSpPr>
           <a:xfrm>
-            <a:off x="548640" y="4928726"/>
-            <a:ext cx="11094415" cy="1309404"/>
-            <a:chOff x="548640" y="4928726"/>
-            <a:chExt cx="11094415" cy="1309404"/>
+            <a:off x="548640" y="5112176"/>
+            <a:ext cx="11094415" cy="1072043"/>
+            <a:chOff x="548640" y="5112176"/>
+            <a:chExt cx="11094415" cy="1072043"/>
           </a:xfrm>
         </p:grpSpPr>
         <mc:AlternateContent xmlns:mc="http://schemas.openxmlformats.org/markup-compatibility/2006">
@@ -22851,12 +22851,12 @@
               </p:nvSpPr>
               <p:spPr>
                 <a:xfrm>
-                  <a:off x="548640" y="4928726"/>
-                  <a:ext cx="11094415" cy="1309404"/>
+                  <a:off x="548640" y="5112176"/>
+                  <a:ext cx="11094415" cy="1072043"/>
                 </a:xfrm>
                 <a:prstGeom prst="roundRect">
                   <a:avLst>
-                    <a:gd name="adj" fmla="val 6284"/>
+                    <a:gd name="adj" fmla="val 7676"/>
                   </a:avLst>
                 </a:prstGeom>
                 <a:solidFill>
@@ -22870,7 +22870,7 @@
                 </a:ln>
               </p:spPr>
               <p:txBody>
-                <a:bodyPr rtlCol="0" anchor="t" wrap="square" lIns="137160" rIns="137160" tIns="518579" bIns="73152">
+                <a:bodyPr rtlCol="0" anchor="t" wrap="square" lIns="137160" rIns="137160" tIns="537439" bIns="73152">
                   <a:noAutofit/>
                 </a:bodyPr>
                 <a:lstStyle>
@@ -23078,7 +23078,7 @@
                     <a:buNone/>
                   </a:pPr>
                   <a:r>
-                    <a:rPr sz="1780">
+                    <a:rPr sz="1880">
                       <a:solidFill>
                         <a:schemeClr val="tx1"/>
                       </a:solidFill>
@@ -23088,7 +23088,7 @@
                   <a14:m>
                     <m:oMath xmlns:m="http://schemas.openxmlformats.org/officeDocument/2006/math">
                       <m:r>
-                        <a:rPr lang="en-US" sz="1780" i="1">
+                        <a:rPr lang="en-US" sz="1880" i="1">
                           <a:solidFill>
                             <a:schemeClr val="tx1"/>
                           </a:solidFill>
@@ -23100,7 +23100,7 @@
                         <m:rPr>
                           <m:sty m:val="p"/>
                         </m:rPr>
-                        <a:rPr lang="en-US" sz="1780" i="0">
+                        <a:rPr lang="en-US" sz="1880" i="0">
                           <a:solidFill>
                             <a:schemeClr val="tx1"/>
                           </a:solidFill>
@@ -23109,7 +23109,7 @@
                         <m:t>(</m:t>
                       </m:r>
                       <m:r>
-                        <a:rPr lang="en-US" sz="1780" i="1">
+                        <a:rPr lang="en-US" sz="1880" i="1">
                           <a:solidFill>
                             <a:schemeClr val="tx1"/>
                           </a:solidFill>
@@ -23121,7 +23121,7 @@
                         <m:rPr>
                           <m:sty m:val="p"/>
                         </m:rPr>
-                        <a:rPr lang="en-US" sz="1780" i="0">
+                        <a:rPr lang="en-US" sz="1880" i="0">
                           <a:solidFill>
                             <a:schemeClr val="tx1"/>
                           </a:solidFill>
@@ -23133,7 +23133,7 @@
                         <m:rPr>
                           <m:sty m:val="p"/>
                         </m:rPr>
-                        <a:rPr lang="en-US" sz="1780" i="0">
+                        <a:rPr lang="en-US" sz="1880" i="0">
                           <a:solidFill>
                             <a:schemeClr val="tx1"/>
                           </a:solidFill>
@@ -23145,7 +23145,7 @@
                         <m:rPr>
                           <m:sty m:val="p"/>
                         </m:rPr>
-                        <a:rPr lang="en-US" sz="1780" i="0">
+                        <a:rPr lang="en-US" sz="1880" i="0">
                           <a:solidFill>
                             <a:schemeClr val="tx1"/>
                           </a:solidFill>
@@ -23154,7 +23154,7 @@
                         <m:t>(</m:t>
                       </m:r>
                       <m:r>
-                        <a:rPr lang="en-US" sz="1780" i="0">
+                        <a:rPr lang="en-US" sz="1880" i="0">
                           <a:solidFill>
                             <a:schemeClr val="tx1"/>
                           </a:solidFill>
@@ -23166,7 +23166,7 @@
                         <m:rPr>
                           <m:sty m:val="p"/>
                         </m:rPr>
-                        <a:rPr lang="en-US" sz="1780" i="0">
+                        <a:rPr lang="en-US" sz="1880" i="0">
                           <a:solidFill>
                             <a:schemeClr val="tx1"/>
                           </a:solidFill>
@@ -23177,7 +23177,7 @@
                       <m:sSub>
                         <m:e>
                           <m:r>
-                            <a:rPr lang="en-US" sz="1780" i="1">
+                            <a:rPr lang="en-US" sz="1880" i="1">
                               <a:solidFill>
                                 <a:schemeClr val="tx1"/>
                               </a:solidFill>
@@ -23188,7 +23188,7 @@
                         </m:e>
                         <m:sub>
                           <m:r>
-                            <a:rPr lang="en-US" sz="1780" i="1">
+                            <a:rPr lang="en-US" sz="1880" i="1">
                               <a:solidFill>
                                 <a:schemeClr val="tx1"/>
                               </a:solidFill>
@@ -23197,7 +23197,7 @@
                             <m:t>l</m:t>
                           </m:r>
                           <m:r>
-                            <a:rPr lang="en-US" sz="1780" i="1">
+                            <a:rPr lang="en-US" sz="1880" i="1">
                               <a:solidFill>
                                 <a:schemeClr val="tx1"/>
                               </a:solidFill>
@@ -23211,7 +23211,7 @@
                         <m:rPr>
                           <m:sty m:val="p"/>
                         </m:rPr>
-                        <a:rPr lang="en-US" sz="1780" i="0">
+                        <a:rPr lang="en-US" sz="1880" i="0">
                           <a:solidFill>
                             <a:schemeClr val="tx1"/>
                           </a:solidFill>
@@ -23220,7 +23220,7 @@
                         <m:t>)</m:t>
                       </m:r>
                       <m:r>
-                        <a:rPr lang="en-US" sz="1780" i="0">
+                        <a:rPr lang="en-US" sz="1880" i="0">
                           <a:solidFill>
                             <a:schemeClr val="tx1"/>
                           </a:solidFill>
@@ -23233,7 +23233,7 @@
                           <m:scr m:val="double-struck"/>
                           <m:sty m:val="p"/>
                         </m:rPr>
-                        <a:rPr lang="en-US" sz="1780" i="0">
+                        <a:rPr lang="en-US" sz="1880" i="0">
                           <a:solidFill>
                             <a:schemeClr val="tx1"/>
                           </a:solidFill>
@@ -23245,7 +23245,7 @@
                         <m:rPr>
                           <m:sty m:val="p"/>
                         </m:rPr>
-                        <a:rPr lang="en-US" sz="1780" i="0">
+                        <a:rPr lang="en-US" sz="1880" i="0">
                           <a:solidFill>
                             <a:schemeClr val="tx1"/>
                           </a:solidFill>
@@ -23254,7 +23254,7 @@
                         <m:t>[</m:t>
                       </m:r>
                       <m:r>
-                        <a:rPr lang="en-US" sz="1780" i="1">
+                        <a:rPr lang="en-US" sz="1880" i="1">
                           <a:solidFill>
                             <a:schemeClr val="tx1"/>
                           </a:solidFill>
@@ -23266,7 +23266,7 @@
                         <m:rPr>
                           <m:sty m:val="p"/>
                         </m:rPr>
-                        <a:rPr lang="en-US" sz="1780" i="0">
+                        <a:rPr lang="en-US" sz="1880" i="0">
                           <a:solidFill>
                             <a:schemeClr val="tx1"/>
                           </a:solidFill>
@@ -23277,7 +23277,7 @@
                       <m:sSub>
                         <m:e>
                           <m:r>
-                            <a:rPr lang="en-US" sz="1780" i="1">
+                            <a:rPr lang="en-US" sz="1880" i="1">
                               <a:solidFill>
                                 <a:schemeClr val="tx1"/>
                               </a:solidFill>
@@ -23288,7 +23288,7 @@
                         </m:e>
                         <m:sub>
                           <m:r>
-                            <a:rPr lang="en-US" sz="1780" i="1">
+                            <a:rPr lang="en-US" sz="1880" i="1">
                               <a:solidFill>
                                 <a:schemeClr val="tx1"/>
                               </a:solidFill>
@@ -23302,7 +23302,7 @@
                         <m:rPr>
                           <m:sty m:val="p"/>
                         </m:rPr>
-                        <a:rPr lang="en-US" sz="1780" i="0">
+                        <a:rPr lang="en-US" sz="1880" i="0">
                           <a:solidFill>
                             <a:schemeClr val="tx1"/>
                           </a:solidFill>
@@ -23314,7 +23314,7 @@
                         <m:rPr>
                           <m:sty m:val="p"/>
                         </m:rPr>
-                        <a:rPr lang="en-US" sz="1780" i="0">
+                        <a:rPr lang="en-US" sz="1880" i="0">
                           <a:solidFill>
                             <a:schemeClr val="tx1"/>
                           </a:solidFill>
@@ -23325,7 +23325,7 @@
                       <m:sSub>
                         <m:e>
                           <m:r>
-                            <a:rPr lang="en-US" sz="1780" i="1">
+                            <a:rPr lang="en-US" sz="1880" i="1">
                               <a:solidFill>
                                 <a:schemeClr val="tx1"/>
                               </a:solidFill>
@@ -23336,7 +23336,7 @@
                         </m:e>
                         <m:sub>
                           <m:r>
-                            <a:rPr lang="en-US" sz="1780" i="1">
+                            <a:rPr lang="en-US" sz="1880" i="1">
                               <a:solidFill>
                                 <a:schemeClr val="tx1"/>
                               </a:solidFill>
@@ -23345,7 +23345,7 @@
                             <m:t>l</m:t>
                           </m:r>
                           <m:r>
-                            <a:rPr lang="en-US" sz="1780" i="1">
+                            <a:rPr lang="en-US" sz="1880" i="1">
                               <a:solidFill>
                                 <a:schemeClr val="tx1"/>
                               </a:solidFill>
@@ -23359,7 +23359,7 @@
                         <m:rPr>
                           <m:sty m:val="p"/>
                         </m:rPr>
-                        <a:rPr lang="en-US" sz="1780" i="0">
+                        <a:rPr lang="en-US" sz="1880" i="0">
                           <a:solidFill>
                             <a:schemeClr val="tx1"/>
                           </a:solidFill>
@@ -23371,7 +23371,7 @@
                         <m:rPr>
                           <m:sty m:val="p"/>
                         </m:rPr>
-                        <a:rPr lang="en-US" sz="1780" i="0">
+                        <a:rPr lang="en-US" sz="1880" i="0">
                           <a:solidFill>
                             <a:schemeClr val="tx1"/>
                           </a:solidFill>
@@ -23380,7 +23380,7 @@
                         <m:t>|</m:t>
                       </m:r>
                       <m:r>
-                        <a:rPr lang="en-US" sz="1780" i="1">
+                        <a:rPr lang="en-US" sz="1880" i="1">
                           <a:solidFill>
                             <a:schemeClr val="tx1"/>
                           </a:solidFill>
@@ -23392,7 +23392,7 @@
                         <m:rPr>
                           <m:sty m:val="p"/>
                         </m:rPr>
-                        <a:rPr lang="en-US" sz="1780" i="0">
+                        <a:rPr lang="en-US" sz="1880" i="0">
                           <a:solidFill>
                             <a:schemeClr val="tx1"/>
                           </a:solidFill>
@@ -23403,7 +23403,7 @@
                     </m:oMath>
                   </a14:m>
                   <a:r>
-                    <a:rPr sz="1780">
+                    <a:rPr sz="1880">
                       <a:solidFill>
                         <a:schemeClr val="tx1"/>
                       </a:solidFill>
@@ -23423,12 +23423,12 @@
               </p:nvSpPr>
               <p:spPr>
                 <a:xfrm>
-                  <a:off x="548640" y="4928726"/>
-                  <a:ext cx="11094415" cy="1309404"/>
+                  <a:off x="548640" y="5112176"/>
+                  <a:ext cx="11094415" cy="1072043"/>
                 </a:xfrm>
                 <a:prstGeom prst="roundRect">
                   <a:avLst>
-                    <a:gd name="adj" fmla="val 6284"/>
+                    <a:gd name="adj" fmla="val 7676"/>
                   </a:avLst>
                 </a:prstGeom>
                 <a:solidFill>
@@ -23442,7 +23442,7 @@
                 </a:ln>
               </p:spPr>
               <p:txBody>
-                <a:bodyPr rtlCol="0" anchor="t" wrap="square" lIns="137160" rIns="137160" tIns="518579" bIns="73152">
+                <a:bodyPr rtlCol="0" anchor="t" wrap="square" lIns="137160" rIns="137160" tIns="537439" bIns="73152">
                   <a:noAutofit/>
                 </a:bodyPr>
                 <a:lstStyle>
@@ -23650,7 +23650,7 @@
                     <a:buNone/>
                   </a:pPr>
                   <a:r>
-                    <a:rPr sz="1780">
+                    <a:rPr sz="1880">
                       <a:solidFill>
                         <a:schemeClr val="tx1"/>
                       </a:solidFill>
@@ -23658,7 +23658,7 @@
                     <a:t>Target distribution </a:t>
                   </a:r>
                   <a:r>
-                    <a:rPr sz="1780" i="1">
+                    <a:rPr sz="1880" i="1">
                       <a:solidFill>
                         <a:schemeClr val="tx1"/>
                       </a:solidFill>
@@ -23666,7 +23666,7 @@
                     <a:t>q(k) = (1 − ε_(ls)) mathbb1[k = y_t] + ε_(ls) / |V|</a:t>
                   </a:r>
                   <a:r>
-                    <a:rPr sz="1780">
+                    <a:rPr sz="1880">
                       <a:solidFill>
                         <a:schemeClr val="tx1"/>
                       </a:solidFill>
@@ -23688,12 +23688,12 @@
               </p:nvSpPr>
               <p:spPr>
                 <a:xfrm>
-                  <a:off x="548640" y="4928726"/>
-                  <a:ext cx="11094415" cy="445427"/>
+                  <a:off x="548640" y="5112176"/>
+                  <a:ext cx="11094415" cy="464287"/>
                 </a:xfrm>
                 <a:prstGeom prst="round2SameRect">
                   <a:avLst>
-                    <a:gd name="adj1" fmla="val 18475"/>
+                    <a:gd name="adj1" fmla="val 17725"/>
                     <a:gd name="adj2" fmla="val 0"/>
                   </a:avLst>
                 </a:prstGeom>
@@ -23710,7 +23710,7 @@
                 <a:p>
                   <a:pPr algn="l"/>
                   <a:r>
-                    <a:rPr sz="1869" b="1">
+                    <a:rPr sz="1974" b="1">
                       <a:solidFill>
                         <a:schemeClr val="bg1"/>
                       </a:solidFill>
@@ -23722,7 +23722,7 @@
                       <m:sSub>
                         <m:e>
                           <m:r>
-                            <a:rPr lang="en-US" sz="1869" b="1" i="1">
+                            <a:rPr lang="en-US" sz="1974" b="1" i="1">
                               <a:solidFill>
                                 <a:schemeClr val="bg1"/>
                               </a:solidFill>
@@ -23733,7 +23733,7 @@
                         </m:e>
                         <m:sub>
                           <m:r>
-                            <a:rPr lang="en-US" sz="1869" b="1" i="1">
+                            <a:rPr lang="en-US" sz="1974" b="1" i="1">
                               <a:solidFill>
                                 <a:schemeClr val="bg1"/>
                               </a:solidFill>
@@ -23742,7 +23742,7 @@
                             <m:t>l</m:t>
                           </m:r>
                           <m:r>
-                            <a:rPr lang="en-US" sz="1869" b="1" i="1">
+                            <a:rPr lang="en-US" sz="1974" b="1" i="1">
                               <a:solidFill>
                                 <a:schemeClr val="bg1"/>
                               </a:solidFill>
@@ -23756,7 +23756,7 @@
                         <m:rPr>
                           <m:sty m:val="p"/>
                         </m:rPr>
-                        <a:rPr lang="en-US" sz="1869" b="1" i="0">
+                        <a:rPr lang="en-US" sz="1974" b="1" i="0">
                           <a:solidFill>
                             <a:schemeClr val="bg1"/>
                           </a:solidFill>
@@ -23765,7 +23765,7 @@
                         <m:t>=</m:t>
                       </m:r>
                       <m:r>
-                        <a:rPr lang="en-US" sz="1869" b="1" i="0">
+                        <a:rPr lang="en-US" sz="1974" b="1" i="0">
                           <a:solidFill>
                             <a:schemeClr val="bg1"/>
                           </a:solidFill>
@@ -23776,7 +23776,7 @@
                     </m:oMath>
                   </a14:m>
                   <a:r>
-                    <a:rPr sz="1869" b="1">
+                    <a:rPr sz="1974" b="1">
                       <a:solidFill>
                         <a:schemeClr val="bg1"/>
                       </a:solidFill>
@@ -23796,12 +23796,12 @@
               </p:nvSpPr>
               <p:spPr>
                 <a:xfrm>
-                  <a:off x="548640" y="4928726"/>
-                  <a:ext cx="11094415" cy="445427"/>
+                  <a:off x="548640" y="5112176"/>
+                  <a:ext cx="11094415" cy="464287"/>
                 </a:xfrm>
                 <a:prstGeom prst="round2SameRect">
                   <a:avLst>
-                    <a:gd name="adj1" fmla="val 18475"/>
+                    <a:gd name="adj1" fmla="val 17725"/>
                     <a:gd name="adj2" fmla="val 0"/>
                   </a:avLst>
                 </a:prstGeom>
@@ -23818,7 +23818,7 @@
                 <a:p>
                   <a:pPr algn="l"/>
                   <a:r>
-                    <a:rPr sz="1869" b="1">
+                    <a:rPr sz="1974" b="1">
                       <a:solidFill>
                         <a:schemeClr val="bg1"/>
                       </a:solidFill>
@@ -23826,7 +23826,7 @@
                     <a:t>Label smoothing (</a:t>
                   </a:r>
                   <a:r>
-                    <a:rPr sz="1869" b="1" i="1">
+                    <a:rPr sz="1974" b="1" i="1">
                       <a:solidFill>
                         <a:schemeClr val="bg1"/>
                       </a:solidFill>
@@ -23834,7 +23834,7 @@
                     <a:t>ε_(ls) = 0.1</a:t>
                   </a:r>
                   <a:r>
-                    <a:rPr sz="1869" b="1">
+                    <a:rPr sz="1974" b="1">
                       <a:solidFill>
                         <a:schemeClr val="bg1"/>
                       </a:solidFill>
@@ -25159,8 +25159,8 @@
               <p:nvPr/>
             </p:nvGraphicFramePr>
             <p:xfrm>
-              <a:off x="1842300" y="2729395"/>
-              <a:ext cx="8507096" cy="1340283"/>
+              <a:off x="1842300" y="2727833"/>
+              <a:ext cx="8507096" cy="1343406"/>
             </p:xfrm>
             <a:graphic>
               <a:graphicData uri="http://schemas.openxmlformats.org/drawingml/2006/table">
@@ -25177,7 +25177,7 @@
                     <a:gridCol w="1301115"/>
                     <a:gridCol w="2202180"/>
                   </a:tblGrid>
-                  <a:tr h="446761">
+                  <a:tr h="447802">
                     <a:tc>
                       <a:txBody>
                         <a:bodyPr/>
@@ -25508,7 +25508,7 @@
                       </a:tcPr>
                     </a:tc>
                   </a:tr>
-                  <a:tr h="446761">
+                  <a:tr h="447802">
                     <a:tc>
                       <a:txBody>
                         <a:bodyPr/>
@@ -25734,7 +25734,7 @@
                       </a:tcPr>
                     </a:tc>
                   </a:tr>
-                  <a:tr h="446761">
+                  <a:tr h="447802">
                     <a:tc>
                       <a:txBody>
                         <a:bodyPr/>
@@ -25996,8 +25996,8 @@
               <p:nvPr/>
             </p:nvGraphicFramePr>
             <p:xfrm>
-              <a:off x="1842300" y="2729395"/>
-              <a:ext cx="8507096" cy="1340283"/>
+              <a:off x="1842300" y="2727833"/>
+              <a:ext cx="8507096" cy="1343406"/>
             </p:xfrm>
             <a:graphic>
               <a:graphicData uri="http://schemas.openxmlformats.org/drawingml/2006/table">
@@ -26014,7 +26014,7 @@
                     <a:gridCol w="1301115"/>
                     <a:gridCol w="2202180"/>
                   </a:tblGrid>
-                  <a:tr h="446761">
+                  <a:tr h="447802">
                     <a:tc>
                       <a:txBody>
                         <a:bodyPr/>
@@ -26282,7 +26282,7 @@
                       </a:tcPr>
                     </a:tc>
                   </a:tr>
-                  <a:tr h="446761">
+                  <a:tr h="447802">
                     <a:tc>
                       <a:txBody>
                         <a:bodyPr/>
@@ -26508,7 +26508,7 @@
                       </a:tcPr>
                     </a:tc>
                   </a:tr>
-                  <a:tr h="446761">
+                  <a:tr h="447802">
                     <a:tc>
                       <a:txBody>
                         <a:bodyPr/>
@@ -26771,7 +26771,7 @@
             </p:nvSpPr>
             <p:spPr>
               <a:xfrm>
-                <a:off x="548640" y="4298277"/>
+                <a:off x="548640" y="4299839"/>
                 <a:ext cx="11094415" cy="470408"/>
               </a:xfrm>
               <a:prstGeom prst="rect">
@@ -27318,7 +27318,7 @@
             </p:nvSpPr>
             <p:spPr>
               <a:xfrm>
-                <a:off x="548640" y="4298277"/>
+                <a:off x="548640" y="4299839"/>
                 <a:ext cx="11094415" cy="470408"/>
               </a:xfrm>
               <a:prstGeom prst="rect">
@@ -27713,8 +27713,8 @@
               <p:nvPr/>
             </p:nvGraphicFramePr>
             <p:xfrm>
-              <a:off x="565156" y="2037366"/>
-              <a:ext cx="11061382" cy="1787044"/>
+              <a:off x="565156" y="2186159"/>
+              <a:ext cx="11061382" cy="1791208"/>
             </p:xfrm>
             <a:graphic>
               <a:graphicData uri="http://schemas.openxmlformats.org/drawingml/2006/table">
@@ -27728,7 +27728,7 @@
                     <a:gridCol w="2502535"/>
                     <a:gridCol w="2652712"/>
                   </a:tblGrid>
-                  <a:tr h="446761">
+                  <a:tr h="447802">
                     <a:tc>
                       <a:txBody>
                         <a:bodyPr/>
@@ -27866,7 +27866,7 @@
                       </a:tcPr>
                     </a:tc>
                   </a:tr>
-                  <a:tr h="446761">
+                  <a:tr h="447802">
                     <a:tc>
                       <a:txBody>
                         <a:bodyPr/>
@@ -28146,7 +28146,7 @@
                       </a:tcPr>
                     </a:tc>
                   </a:tr>
-                  <a:tr h="446761">
+                  <a:tr h="447802">
                     <a:tc>
                       <a:txBody>
                         <a:bodyPr/>
@@ -28446,7 +28446,7 @@
                       </a:tcPr>
                     </a:tc>
                   </a:tr>
-                  <a:tr h="446761">
+                  <a:tr h="447802">
                     <a:tc>
                       <a:txBody>
                         <a:bodyPr/>
@@ -28789,8 +28789,8 @@
               <p:nvPr/>
             </p:nvGraphicFramePr>
             <p:xfrm>
-              <a:off x="565156" y="2037366"/>
-              <a:ext cx="11061382" cy="1787044"/>
+              <a:off x="565156" y="2186159"/>
+              <a:ext cx="11061382" cy="1791208"/>
             </p:xfrm>
             <a:graphic>
               <a:graphicData uri="http://schemas.openxmlformats.org/drawingml/2006/table">
@@ -28804,7 +28804,7 @@
                     <a:gridCol w="2502535"/>
                     <a:gridCol w="2652712"/>
                   </a:tblGrid>
-                  <a:tr h="446761">
+                  <a:tr h="447802">
                     <a:tc>
                       <a:txBody>
                         <a:bodyPr/>
@@ -28942,7 +28942,7 @@
                       </a:tcPr>
                     </a:tc>
                   </a:tr>
-                  <a:tr h="446761">
+                  <a:tr h="447802">
                     <a:tc>
                       <a:txBody>
                         <a:bodyPr/>
@@ -29072,7 +29072,7 @@
                       </a:tcPr>
                     </a:tc>
                   </a:tr>
-                  <a:tr h="446761">
+                  <a:tr h="447802">
                     <a:tc>
                       <a:txBody>
                         <a:bodyPr/>
@@ -29222,7 +29222,7 @@
                       </a:tcPr>
                     </a:tc>
                   </a:tr>
-                  <a:tr h="446761">
+                  <a:tr h="447802">
                     <a:tc>
                       <a:txBody>
                         <a:bodyPr/>
@@ -29366,10 +29366,10 @@
         </p:nvGrpSpPr>
         <p:grpSpPr>
           <a:xfrm>
-            <a:off x="548640" y="4053008"/>
-            <a:ext cx="11094415" cy="1407706"/>
-            <a:chOff x="548640" y="4053008"/>
-            <a:chExt cx="11094415" cy="1407706"/>
+            <a:off x="548640" y="4205967"/>
+            <a:ext cx="11094415" cy="1105954"/>
+            <a:chOff x="548640" y="4205967"/>
+            <a:chExt cx="11094415" cy="1105954"/>
           </a:xfrm>
         </p:grpSpPr>
         <mc:AlternateContent xmlns:mc="http://schemas.openxmlformats.org/markup-compatibility/2006">
@@ -29382,12 +29382,12 @@
               </p:nvSpPr>
               <p:spPr>
                 <a:xfrm>
-                  <a:off x="548640" y="4053008"/>
-                  <a:ext cx="11094415" cy="1407706"/>
+                  <a:off x="548640" y="4205967"/>
+                  <a:ext cx="11094415" cy="1105954"/>
                 </a:xfrm>
                 <a:prstGeom prst="roundRect">
                   <a:avLst>
-                    <a:gd name="adj" fmla="val 5846"/>
+                    <a:gd name="adj" fmla="val 7441"/>
                   </a:avLst>
                 </a:prstGeom>
                 <a:solidFill>
@@ -29713,12 +29713,12 @@
               </p:nvSpPr>
               <p:spPr>
                 <a:xfrm>
-                  <a:off x="548640" y="4053008"/>
-                  <a:ext cx="11094415" cy="1407706"/>
+                  <a:off x="548640" y="4205967"/>
+                  <a:ext cx="11094415" cy="1105954"/>
                 </a:xfrm>
                 <a:prstGeom prst="roundRect">
                   <a:avLst>
-                    <a:gd name="adj" fmla="val 5846"/>
+                    <a:gd name="adj" fmla="val 7441"/>
                   </a:avLst>
                 </a:prstGeom>
                 <a:solidFill>
@@ -29992,7 +29992,7 @@
           </p:nvSpPr>
           <p:spPr>
             <a:xfrm>
-              <a:off x="548640" y="4053008"/>
+              <a:off x="548640" y="4205967"/>
               <a:ext cx="11094415" cy="483146"/>
             </a:xfrm>
             <a:prstGeom prst="round2SameRect">
@@ -31560,10 +31560,10 @@
         </p:nvGrpSpPr>
         <p:grpSpPr>
           <a:xfrm>
-            <a:off x="8188757" y="4873667"/>
-            <a:ext cx="3454298" cy="1105954"/>
-            <a:chOff x="8188757" y="4873667"/>
-            <a:chExt cx="3454298" cy="1105954"/>
+            <a:off x="8188757" y="4722791"/>
+            <a:ext cx="3454298" cy="1407706"/>
+            <a:chOff x="8188757" y="4722791"/>
+            <a:chExt cx="3454298" cy="1407706"/>
           </a:xfrm>
         </p:grpSpPr>
         <mc:AlternateContent xmlns:mc="http://schemas.openxmlformats.org/markup-compatibility/2006">
@@ -31576,12 +31576,12 @@
               </p:nvSpPr>
               <p:spPr>
                 <a:xfrm>
-                  <a:off x="8188757" y="4873667"/>
-                  <a:ext cx="3454298" cy="1105954"/>
+                  <a:off x="8188757" y="4722791"/>
+                  <a:ext cx="3454298" cy="1407706"/>
                 </a:xfrm>
                 <a:prstGeom prst="roundRect">
                   <a:avLst>
-                    <a:gd name="adj" fmla="val 7441"/>
+                    <a:gd name="adj" fmla="val 5846"/>
                   </a:avLst>
                 </a:prstGeom>
                 <a:solidFill>
@@ -31890,12 +31890,12 @@
               </p:nvSpPr>
               <p:spPr>
                 <a:xfrm>
-                  <a:off x="8188757" y="4873667"/>
-                  <a:ext cx="3454298" cy="1105954"/>
+                  <a:off x="8188757" y="4722791"/>
+                  <a:ext cx="3454298" cy="1407706"/>
                 </a:xfrm>
                 <a:prstGeom prst="roundRect">
                   <a:avLst>
-                    <a:gd name="adj" fmla="val 7441"/>
+                    <a:gd name="adj" fmla="val 5846"/>
                   </a:avLst>
                 </a:prstGeom>
                 <a:solidFill>
@@ -32145,7 +32145,7 @@
           </p:nvSpPr>
           <p:spPr>
             <a:xfrm>
-              <a:off x="8188757" y="4873667"/>
+              <a:off x="8188757" y="4722791"/>
               <a:ext cx="3454298" cy="483146"/>
             </a:xfrm>
             <a:prstGeom prst="round2SameRect">
@@ -37988,8 +37988,8 @@
         </p:nvSpPr>
         <p:spPr>
           <a:xfrm>
-            <a:off x="2490673" y="1188720"/>
-            <a:ext cx="7210349" cy="3004312"/>
+            <a:off x="2198065" y="1188720"/>
+            <a:ext cx="7795565" cy="3248152"/>
           </a:xfrm>
           <a:prstGeom prst="rect">
             <a:avLst/>
@@ -38055,7 +38055,7 @@
             </p:nvSpPr>
             <p:spPr>
               <a:xfrm>
-                <a:off x="548640" y="4421632"/>
+                <a:off x="548640" y="4665472"/>
                 <a:ext cx="11094415" cy="960120"/>
               </a:xfrm>
               <a:prstGeom prst="rect">
@@ -38401,7 +38401,7 @@
             </p:nvSpPr>
             <p:spPr>
               <a:xfrm>
-                <a:off x="548640" y="4421632"/>
+                <a:off x="548640" y="4665472"/>
                 <a:ext cx="11094415" cy="960120"/>
               </a:xfrm>
               <a:prstGeom prst="rect">
@@ -38435,8 +38435,8 @@
             </p:nvSpPr>
             <p:spPr>
               <a:xfrm>
-                <a:off x="548640" y="5610352"/>
-                <a:ext cx="11094415" cy="699008"/>
+                <a:off x="548640" y="5854192"/>
+                <a:ext cx="11094415" cy="455168"/>
               </a:xfrm>
               <a:prstGeom prst="rect">
                 <a:avLst/>
@@ -38846,8 +38846,8 @@
             </p:nvSpPr>
             <p:spPr>
               <a:xfrm>
-                <a:off x="548640" y="5610352"/>
-                <a:ext cx="11094415" cy="699008"/>
+                <a:off x="548640" y="5854192"/>
+                <a:ext cx="11094415" cy="455168"/>
               </a:xfrm>
               <a:prstGeom prst="rect">
                 <a:avLst/>
